--- a/assets/pptx/catalog-140.pptx
+++ b/assets/pptx/catalog-140.pptx
@@ -3476,7 +3476,7 @@
                 <a:ea typeface="Ebrima"/>
                 <a:cs typeface="Ebrima"/>
               </a:rPr>
-              <a:t>ይሄ ነው የሚረባ ይሄ ነው የሚበጅ (4x)</a:t>
+              <a:t>ይሄ ነው የሚረባ ይሄ ነው የሚበጅ 4x</a:t>
             </a:r>
           </a:p>
         </p:txBody>
@@ -3646,7 +3646,7 @@
                 <a:ea typeface="Ebrima"/>
                 <a:cs typeface="Ebrima"/>
               </a:rPr>
-              <a:t>የሚሸከመኝ እንደልጅነቴ አለልኝ ቸሩ አባቴ (2x)</a:t>
+              <a:t>የሚሸከመኝ እንደልጅነቴ አለልኝ ቸሩ አባቴ 2x</a:t>
             </a:r>
           </a:p>
         </p:txBody>
@@ -4094,7 +4094,7 @@
                 <a:ea typeface="Ebrima"/>
                 <a:cs typeface="Ebrima"/>
               </a:rPr>
-              <a:t>ግን እኮ ማንንም አይንቅም (2x)</a:t>
+              <a:t>ግን እኮ ማንንም አይንቅም 2x</a:t>
             </a:r>
           </a:p>
         </p:txBody>
